--- a/generated/Tier 1 Broker Scorecards/Aic Insurance Agency LLC_Broker_Scorecard.pptx
+++ b/generated/Tier 1 Broker Scorecards/Aic Insurance Agency LLC_Broker_Scorecard.pptx
@@ -3394,7 +3394,7 @@
                         <a:rPr sz="900">
                           <a:latin typeface="Segoe UI"/>
                         </a:rPr>
-                        <a:t>Tier 1  |  8.21% / 15.00%</a:t>
+                        <a:t>Tier 1  |  7.91% / 15.00%</a:t>
                       </a:r>
                     </a:p>
                   </a:txBody>
@@ -3653,7 +3653,7 @@
                         <a:rPr sz="900">
                           <a:latin typeface="Segoe UI"/>
                         </a:rPr>
-                        <a:t>Fleet Subs: 58  |  Binds: 4</a:t>
+                        <a:t>Fleet Subs: 59  |  Binds: 4</a:t>
                       </a:r>
                     </a:p>
                   </a:txBody>
@@ -3690,7 +3690,7 @@
                         <a:rPr sz="900">
                           <a:latin typeface="Segoe UI"/>
                         </a:rPr>
-                        <a:t>Fleet Bound Premium: $335,911.57</a:t>
+                        <a:t>Fleet Bound Premium: $352,709.02</a:t>
                       </a:r>
                     </a:p>
                   </a:txBody>
@@ -3727,7 +3727,7 @@
                         <a:rPr sz="900">
                           <a:latin typeface="Segoe UI"/>
                         </a:rPr>
-                        <a:t>Fleet Book %: 52.3%</a:t>
+                        <a:t>Fleet Book %: 54.9%</a:t>
                       </a:r>
                     </a:p>
                   </a:txBody>
@@ -3766,7 +3766,7 @@
                         <a:rPr sz="900">
                           <a:latin typeface="Segoe UI"/>
                         </a:rPr>
-                        <a:t>Non-Fleet Subs: 332  |  Binds: 28</a:t>
+                        <a:t>Non-Fleet Subs: 333  |  Binds: 27</a:t>
                       </a:r>
                     </a:p>
                   </a:txBody>
@@ -3803,7 +3803,7 @@
                         <a:rPr sz="900">
                           <a:latin typeface="Segoe UI"/>
                         </a:rPr>
-                        <a:t>Non-Fleet Bound Premium: $306,511.24</a:t>
+                        <a:t>Non-Fleet Bound Premium: $289,713.79</a:t>
                       </a:r>
                     </a:p>
                   </a:txBody>
@@ -3840,7 +3840,7 @@
                         <a:rPr sz="900">
                           <a:latin typeface="Segoe UI"/>
                         </a:rPr>
-                        <a:t>Non-Fleet Book %: 47.7%</a:t>
+                        <a:t>Non-Fleet Book %: 45.1%</a:t>
                       </a:r>
                     </a:p>
                   </a:txBody>
@@ -4428,7 +4428,7 @@
                           </a:solidFill>
                           <a:latin typeface="Segoe UI"/>
                         </a:rPr>
-                        <a:t>65</a:t>
+                        <a:t>67</a:t>
                       </a:r>
                     </a:p>
                   </a:txBody>
@@ -4707,7 +4707,7 @@
                           </a:solidFill>
                           <a:latin typeface="Segoe UI"/>
                         </a:rPr>
-                        <a:t>10.8%</a:t>
+                        <a:t>9.0%</a:t>
                       </a:r>
                     </a:p>
                   </a:txBody>
@@ -4983,7 +4983,7 @@
                           </a:solidFill>
                           <a:latin typeface="Segoe UI"/>
                         </a:rPr>
-                        <a:t>7</a:t>
+                        <a:t>6</a:t>
                       </a:r>
                     </a:p>
                   </a:txBody>

--- a/generated/Tier 1 Broker Scorecards/Aic Insurance Agency LLC_Broker_Scorecard.pptx
+++ b/generated/Tier 1 Broker Scorecards/Aic Insurance Agency LLC_Broker_Scorecard.pptx
@@ -3394,7 +3394,7 @@
                         <a:rPr sz="900">
                           <a:latin typeface="Segoe UI"/>
                         </a:rPr>
-                        <a:t>Tier 1  |  7.91% / 15.00%</a:t>
+                        <a:t>Tier 1  |  7.34% / 15.00%</a:t>
                       </a:r>
                     </a:p>
                   </a:txBody>
@@ -3653,7 +3653,7 @@
                         <a:rPr sz="900">
                           <a:latin typeface="Segoe UI"/>
                         </a:rPr>
-                        <a:t>Fleet Subs: 59  |  Binds: 4</a:t>
+                        <a:t>Fleet Subs: 61  |  Binds: 4</a:t>
                       </a:r>
                     </a:p>
                   </a:txBody>
@@ -3690,7 +3690,7 @@
                         <a:rPr sz="900">
                           <a:latin typeface="Segoe UI"/>
                         </a:rPr>
-                        <a:t>Fleet Bound Premium: $352,709.02</a:t>
+                        <a:t>Fleet Bound Premium: $361,151.49</a:t>
                       </a:r>
                     </a:p>
                   </a:txBody>
@@ -3727,7 +3727,7 @@
                         <a:rPr sz="900">
                           <a:latin typeface="Segoe UI"/>
                         </a:rPr>
-                        <a:t>Fleet Book %: 54.9%</a:t>
+                        <a:t>Fleet Book %: 56.2%</a:t>
                       </a:r>
                     </a:p>
                   </a:txBody>
@@ -3766,7 +3766,7 @@
                         <a:rPr sz="900">
                           <a:latin typeface="Segoe UI"/>
                         </a:rPr>
-                        <a:t>Non-Fleet Subs: 333  |  Binds: 27</a:t>
+                        <a:t>Non-Fleet Subs: 334  |  Binds: 25</a:t>
                       </a:r>
                     </a:p>
                   </a:txBody>
@@ -3803,7 +3803,7 @@
                         <a:rPr sz="900">
                           <a:latin typeface="Segoe UI"/>
                         </a:rPr>
-                        <a:t>Non-Fleet Bound Premium: $289,713.79</a:t>
+                        <a:t>Non-Fleet Bound Premium: $281,271.32</a:t>
                       </a:r>
                     </a:p>
                   </a:txBody>
@@ -3840,7 +3840,7 @@
                         <a:rPr sz="900">
                           <a:latin typeface="Segoe UI"/>
                         </a:rPr>
-                        <a:t>Non-Fleet Book %: 45.1%</a:t>
+                        <a:t>Non-Fleet Book %: 43.8%</a:t>
                       </a:r>
                     </a:p>
                   </a:txBody>
@@ -4428,7 +4428,7 @@
                           </a:solidFill>
                           <a:latin typeface="Segoe UI"/>
                         </a:rPr>
-                        <a:t>67</a:t>
+                        <a:t>71</a:t>
                       </a:r>
                     </a:p>
                   </a:txBody>
@@ -4624,7 +4624,7 @@
                           </a:solidFill>
                           <a:latin typeface="Segoe UI"/>
                         </a:rPr>
-                        <a:t>12.3%</a:t>
+                        <a:t>11.3%</a:t>
                       </a:r>
                     </a:p>
                   </a:txBody>
@@ -4707,7 +4707,7 @@
                           </a:solidFill>
                           <a:latin typeface="Segoe UI"/>
                         </a:rPr>
-                        <a:t>9.0%</a:t>
+                        <a:t>8.5%</a:t>
                       </a:r>
                     </a:p>
                   </a:txBody>
@@ -4747,7 +4747,7 @@
                         <a:rPr sz="800">
                           <a:latin typeface="Segoe UI"/>
                         </a:rPr>
-                        <a:t>22.8%</a:t>
+                        <a:t>24.6%</a:t>
                       </a:r>
                     </a:p>
                   </a:txBody>
@@ -4906,7 +4906,7 @@
                           </a:solidFill>
                           <a:latin typeface="Segoe UI"/>
                         </a:rPr>
-                        <a:t>13</a:t>
+                        <a:t>12</a:t>
                       </a:r>
                     </a:p>
                   </a:txBody>
@@ -5020,7 +5020,7 @@
                         <a:rPr sz="800">
                           <a:latin typeface="Segoe UI"/>
                         </a:rPr>
-                        <a:t>13</a:t>
+                        <a:t>14</a:t>
                       </a:r>
                     </a:p>
                   </a:txBody>

--- a/generated/Tier 1 Broker Scorecards/Aic Insurance Agency LLC_Broker_Scorecard.pptx
+++ b/generated/Tier 1 Broker Scorecards/Aic Insurance Agency LLC_Broker_Scorecard.pptx
@@ -3357,7 +3357,7 @@
                         <a:rPr sz="800">
                           <a:latin typeface="Segoe UI"/>
                         </a:rPr>
-                        <a:t>$1,633,938.05 / $1,636,322.14 / $642,422.81</a:t>
+                        <a:t>$1,633,938.05 / $1,636,872.13 / $642,972.80</a:t>
                       </a:r>
                     </a:p>
                   </a:txBody>
@@ -3394,7 +3394,7 @@
                         <a:rPr sz="900">
                           <a:latin typeface="Segoe UI"/>
                         </a:rPr>
-                        <a:t>Tier 1  |  7.34% / 15.00%</a:t>
+                        <a:t>Tier 1  |  7.79% / 15.00%</a:t>
                       </a:r>
                     </a:p>
                   </a:txBody>
@@ -3653,7 +3653,7 @@
                         <a:rPr sz="900">
                           <a:latin typeface="Segoe UI"/>
                         </a:rPr>
-                        <a:t>Fleet Subs: 61  |  Binds: 4</a:t>
+                        <a:t>Fleet Subs: 62  |  Binds: 4</a:t>
                       </a:r>
                     </a:p>
                   </a:txBody>
@@ -3690,7 +3690,7 @@
                         <a:rPr sz="900">
                           <a:latin typeface="Segoe UI"/>
                         </a:rPr>
-                        <a:t>Fleet Bound Premium: $361,151.49</a:t>
+                        <a:t>Fleet Bound Premium: $361,033.90</a:t>
                       </a:r>
                     </a:p>
                   </a:txBody>
@@ -3766,7 +3766,7 @@
                         <a:rPr sz="900">
                           <a:latin typeface="Segoe UI"/>
                         </a:rPr>
-                        <a:t>Non-Fleet Subs: 334  |  Binds: 25</a:t>
+                        <a:t>Non-Fleet Subs: 336  |  Binds: 27</a:t>
                       </a:r>
                     </a:p>
                   </a:txBody>
@@ -3803,7 +3803,7 @@
                         <a:rPr sz="900">
                           <a:latin typeface="Segoe UI"/>
                         </a:rPr>
-                        <a:t>Non-Fleet Bound Premium: $281,271.32</a:t>
+                        <a:t>Non-Fleet Bound Premium: $281,938.90</a:t>
                       </a:r>
                     </a:p>
                   </a:txBody>
@@ -4428,7 +4428,7 @@
                           </a:solidFill>
                           <a:latin typeface="Segoe UI"/>
                         </a:rPr>
-                        <a:t>71</a:t>
+                        <a:t>75</a:t>
                       </a:r>
                     </a:p>
                   </a:txBody>
@@ -4624,7 +4624,7 @@
                           </a:solidFill>
                           <a:latin typeface="Segoe UI"/>
                         </a:rPr>
-                        <a:t>11.3%</a:t>
+                        <a:t>12.3%</a:t>
                       </a:r>
                     </a:p>
                   </a:txBody>
@@ -4707,7 +4707,7 @@
                           </a:solidFill>
                           <a:latin typeface="Segoe UI"/>
                         </a:rPr>
-                        <a:t>8.5%</a:t>
+                        <a:t>12.0%</a:t>
                       </a:r>
                     </a:p>
                   </a:txBody>
@@ -4747,7 +4747,7 @@
                         <a:rPr sz="800">
                           <a:latin typeface="Segoe UI"/>
                         </a:rPr>
-                        <a:t>24.6%</a:t>
+                        <a:t>22.8%</a:t>
                       </a:r>
                     </a:p>
                   </a:txBody>
@@ -4906,7 +4906,7 @@
                           </a:solidFill>
                           <a:latin typeface="Segoe UI"/>
                         </a:rPr>
-                        <a:t>12</a:t>
+                        <a:t>13</a:t>
                       </a:r>
                     </a:p>
                   </a:txBody>
@@ -4983,7 +4983,7 @@
                           </a:solidFill>
                           <a:latin typeface="Segoe UI"/>
                         </a:rPr>
-                        <a:t>6</a:t>
+                        <a:t>9</a:t>
                       </a:r>
                     </a:p>
                   </a:txBody>
@@ -5020,7 +5020,7 @@
                         <a:rPr sz="800">
                           <a:latin typeface="Segoe UI"/>
                         </a:rPr>
-                        <a:t>14</a:t>
+                        <a:t>13</a:t>
                       </a:r>
                     </a:p>
                   </a:txBody>
@@ -5262,7 +5262,7 @@
                           </a:solidFill>
                           <a:latin typeface="Segoe UI"/>
                         </a:rPr>
-                        <a:t>$88.1K</a:t>
+                        <a:t>$88.6K</a:t>
                       </a:r>
                     </a:p>
                   </a:txBody>

--- a/generated/Tier 1 Broker Scorecards/Aic Insurance Agency LLC_Broker_Scorecard.pptx
+++ b/generated/Tier 1 Broker Scorecards/Aic Insurance Agency LLC_Broker_Scorecard.pptx
@@ -3394,7 +3394,7 @@
                         <a:rPr sz="900">
                           <a:latin typeface="Segoe UI"/>
                         </a:rPr>
-                        <a:t>Tier 1  |  7.79% / 15.00%</a:t>
+                        <a:t>Tier 1  |  7.35% / 15.00%</a:t>
                       </a:r>
                     </a:p>
                   </a:txBody>
@@ -3653,7 +3653,7 @@
                         <a:rPr sz="900">
                           <a:latin typeface="Segoe UI"/>
                         </a:rPr>
-                        <a:t>Fleet Subs: 62  |  Binds: 4</a:t>
+                        <a:t>Fleet Subs: 63  |  Binds: 3</a:t>
                       </a:r>
                     </a:p>
                   </a:txBody>
@@ -3690,7 +3690,7 @@
                         <a:rPr sz="900">
                           <a:latin typeface="Segoe UI"/>
                         </a:rPr>
-                        <a:t>Fleet Bound Premium: $361,033.90</a:t>
+                        <a:t>Fleet Bound Premium: $294,426.53</a:t>
                       </a:r>
                     </a:p>
                   </a:txBody>
@@ -3727,7 +3727,7 @@
                         <a:rPr sz="900">
                           <a:latin typeface="Segoe UI"/>
                         </a:rPr>
-                        <a:t>Fleet Book %: 56.2%</a:t>
+                        <a:t>Fleet Book %: 45.8%</a:t>
                       </a:r>
                     </a:p>
                   </a:txBody>
@@ -3766,7 +3766,7 @@
                         <a:rPr sz="900">
                           <a:latin typeface="Segoe UI"/>
                         </a:rPr>
-                        <a:t>Non-Fleet Subs: 336  |  Binds: 27</a:t>
+                        <a:t>Non-Fleet Subs: 345  |  Binds: 27</a:t>
                       </a:r>
                     </a:p>
                   </a:txBody>
@@ -3803,7 +3803,7 @@
                         <a:rPr sz="900">
                           <a:latin typeface="Segoe UI"/>
                         </a:rPr>
-                        <a:t>Non-Fleet Bound Premium: $281,938.90</a:t>
+                        <a:t>Non-Fleet Bound Premium: $348,546.27</a:t>
                       </a:r>
                     </a:p>
                   </a:txBody>
@@ -3840,7 +3840,7 @@
                         <a:rPr sz="900">
                           <a:latin typeface="Segoe UI"/>
                         </a:rPr>
-                        <a:t>Non-Fleet Book %: 43.8%</a:t>
+                        <a:t>Non-Fleet Book %: 54.2%</a:t>
                       </a:r>
                     </a:p>
                   </a:txBody>
@@ -4424,11 +4424,11 @@
                       <a:r>
                         <a:rPr sz="800">
                           <a:solidFill>
-                            <a:srgbClr val="DC2626"/>
+                            <a:srgbClr val="059669"/>
                           </a:solidFill>
                           <a:latin typeface="Segoe UI"/>
                         </a:rPr>
-                        <a:t>75</a:t>
+                        <a:t>85</a:t>
                       </a:r>
                     </a:p>
                   </a:txBody>
@@ -4707,7 +4707,7 @@
                           </a:solidFill>
                           <a:latin typeface="Segoe UI"/>
                         </a:rPr>
-                        <a:t>12.0%</a:t>
+                        <a:t>9.4%</a:t>
                       </a:r>
                     </a:p>
                   </a:txBody>
@@ -4983,7 +4983,7 @@
                           </a:solidFill>
                           <a:latin typeface="Segoe UI"/>
                         </a:rPr>
-                        <a:t>9</a:t>
+                        <a:t>8</a:t>
                       </a:r>
                     </a:p>
                   </a:txBody>

--- a/generated/Tier 1 Broker Scorecards/Aic Insurance Agency LLC_Broker_Scorecard.pptx
+++ b/generated/Tier 1 Broker Scorecards/Aic Insurance Agency LLC_Broker_Scorecard.pptx
@@ -3357,7 +3357,7 @@
                         <a:rPr sz="800">
                           <a:latin typeface="Segoe UI"/>
                         </a:rPr>
-                        <a:t>$1,633,938.05 / $1,636,872.13 / $642,972.80</a:t>
+                        <a:t>$1,633,938.05 / $1,654,888.52 / $660,989.19</a:t>
                       </a:r>
                     </a:p>
                   </a:txBody>
@@ -3394,7 +3394,7 @@
                         <a:rPr sz="900">
                           <a:latin typeface="Segoe UI"/>
                         </a:rPr>
-                        <a:t>Tier 1  |  7.35% / 15.00%</a:t>
+                        <a:t>Tier 1  |  6.30% / 15.00%</a:t>
                       </a:r>
                     </a:p>
                   </a:txBody>
@@ -3431,7 +3431,7 @@
                         <a:rPr sz="900">
                           <a:latin typeface="Segoe UI"/>
                         </a:rPr>
-                        <a:t>$2,287,513.27  (28.1% achieved)</a:t>
+                        <a:t>$2,287,513.27  (28.9% achieved)</a:t>
                       </a:r>
                     </a:p>
                   </a:txBody>
@@ -3653,7 +3653,7 @@
                         <a:rPr sz="900">
                           <a:latin typeface="Segoe UI"/>
                         </a:rPr>
-                        <a:t>Fleet Subs: 63  |  Binds: 3</a:t>
+                        <a:t>Fleet Subs: 64  |  Binds: 3</a:t>
                       </a:r>
                     </a:p>
                   </a:txBody>
@@ -3690,7 +3690,7 @@
                         <a:rPr sz="900">
                           <a:latin typeface="Segoe UI"/>
                         </a:rPr>
-                        <a:t>Fleet Bound Premium: $294,426.53</a:t>
+                        <a:t>Fleet Bound Premium: $351,134.73</a:t>
                       </a:r>
                     </a:p>
                   </a:txBody>
@@ -3727,7 +3727,7 @@
                         <a:rPr sz="900">
                           <a:latin typeface="Segoe UI"/>
                         </a:rPr>
-                        <a:t>Fleet Book %: 45.8%</a:t>
+                        <a:t>Fleet Book %: 53.1%</a:t>
                       </a:r>
                     </a:p>
                   </a:txBody>
@@ -3766,7 +3766,7 @@
                         <a:rPr sz="900">
                           <a:latin typeface="Segoe UI"/>
                         </a:rPr>
-                        <a:t>Non-Fleet Subs: 345  |  Binds: 27</a:t>
+                        <a:t>Non-Fleet Subs: 349  |  Binds: 23</a:t>
                       </a:r>
                     </a:p>
                   </a:txBody>
@@ -3803,7 +3803,7 @@
                         <a:rPr sz="900">
                           <a:latin typeface="Segoe UI"/>
                         </a:rPr>
-                        <a:t>Non-Fleet Bound Premium: $348,546.27</a:t>
+                        <a:t>Non-Fleet Bound Premium: $309,854.46</a:t>
                       </a:r>
                     </a:p>
                   </a:txBody>
@@ -3840,7 +3840,7 @@
                         <a:rPr sz="900">
                           <a:latin typeface="Segoe UI"/>
                         </a:rPr>
-                        <a:t>Non-Fleet Book %: 54.2%</a:t>
+                        <a:t>Non-Fleet Book %: 46.9%</a:t>
                       </a:r>
                     </a:p>
                   </a:txBody>
@@ -4428,7 +4428,7 @@
                           </a:solidFill>
                           <a:latin typeface="Segoe UI"/>
                         </a:rPr>
-                        <a:t>85</a:t>
+                        <a:t>91</a:t>
                       </a:r>
                     </a:p>
                   </a:txBody>
@@ -4707,7 +4707,7 @@
                           </a:solidFill>
                           <a:latin typeface="Segoe UI"/>
                         </a:rPr>
-                        <a:t>9.4%</a:t>
+                        <a:t>6.6%</a:t>
                       </a:r>
                     </a:p>
                   </a:txBody>
@@ -4983,7 +4983,7 @@
                           </a:solidFill>
                           <a:latin typeface="Segoe UI"/>
                         </a:rPr>
-                        <a:t>8</a:t>
+                        <a:t>6</a:t>
                       </a:r>
                     </a:p>
                   </a:txBody>
@@ -5262,7 +5262,7 @@
                           </a:solidFill>
                           <a:latin typeface="Segoe UI"/>
                         </a:rPr>
-                        <a:t>$88.6K</a:t>
+                        <a:t>$106.6K</a:t>
                       </a:r>
                     </a:p>
                   </a:txBody>

--- a/generated/Tier 1 Broker Scorecards/Aic Insurance Agency LLC_Broker_Scorecard.pptx
+++ b/generated/Tier 1 Broker Scorecards/Aic Insurance Agency LLC_Broker_Scorecard.pptx
@@ -3394,7 +3394,7 @@
                         <a:rPr sz="900">
                           <a:latin typeface="Segoe UI"/>
                         </a:rPr>
-                        <a:t>Tier 1  |  6.30% / 15.00%</a:t>
+                        <a:t>Tier 1  |  6.54% / 15.00%</a:t>
                       </a:r>
                     </a:p>
                   </a:txBody>
@@ -3690,7 +3690,7 @@
                         <a:rPr sz="900">
                           <a:latin typeface="Segoe UI"/>
                         </a:rPr>
-                        <a:t>Fleet Bound Premium: $351,134.73</a:t>
+                        <a:t>Fleet Bound Premium: $350,837.68</a:t>
                       </a:r>
                     </a:p>
                   </a:txBody>
@@ -3766,7 +3766,7 @@
                         <a:rPr sz="900">
                           <a:latin typeface="Segoe UI"/>
                         </a:rPr>
-                        <a:t>Non-Fleet Subs: 349  |  Binds: 23</a:t>
+                        <a:t>Non-Fleet Subs: 349  |  Binds: 24</a:t>
                       </a:r>
                     </a:p>
                   </a:txBody>
@@ -3803,7 +3803,7 @@
                         <a:rPr sz="900">
                           <a:latin typeface="Segoe UI"/>
                         </a:rPr>
-                        <a:t>Non-Fleet Bound Premium: $309,854.46</a:t>
+                        <a:t>Non-Fleet Bound Premium: $310,151.51</a:t>
                       </a:r>
                     </a:p>
                   </a:txBody>
@@ -4624,7 +4624,7 @@
                           </a:solidFill>
                           <a:latin typeface="Segoe UI"/>
                         </a:rPr>
-                        <a:t>12.3%</a:t>
+                        <a:t>13.2%</a:t>
                       </a:r>
                     </a:p>
                   </a:txBody>
@@ -4906,7 +4906,7 @@
                           </a:solidFill>
                           <a:latin typeface="Segoe UI"/>
                         </a:rPr>
-                        <a:t>13</a:t>
+                        <a:t>14</a:t>
                       </a:r>
                     </a:p>
                   </a:txBody>

--- a/generated/Tier 1 Broker Scorecards/Aic Insurance Agency LLC_Broker_Scorecard.pptx
+++ b/generated/Tier 1 Broker Scorecards/Aic Insurance Agency LLC_Broker_Scorecard.pptx
@@ -3394,7 +3394,7 @@
                         <a:rPr sz="900">
                           <a:latin typeface="Segoe UI"/>
                         </a:rPr>
-                        <a:t>Tier 1  |  6.54% / 15.00%</a:t>
+                        <a:t>Tier 1  |  6.30% / 15.00%</a:t>
                       </a:r>
                     </a:p>
                   </a:txBody>
@@ -3690,7 +3690,7 @@
                         <a:rPr sz="900">
                           <a:latin typeface="Segoe UI"/>
                         </a:rPr>
-                        <a:t>Fleet Bound Premium: $350,837.68</a:t>
+                        <a:t>Fleet Bound Premium: $351,134.73</a:t>
                       </a:r>
                     </a:p>
                   </a:txBody>
@@ -3766,7 +3766,7 @@
                         <a:rPr sz="900">
                           <a:latin typeface="Segoe UI"/>
                         </a:rPr>
-                        <a:t>Non-Fleet Subs: 349  |  Binds: 24</a:t>
+                        <a:t>Non-Fleet Subs: 349  |  Binds: 23</a:t>
                       </a:r>
                     </a:p>
                   </a:txBody>
@@ -3803,7 +3803,7 @@
                         <a:rPr sz="900">
                           <a:latin typeface="Segoe UI"/>
                         </a:rPr>
-                        <a:t>Non-Fleet Bound Premium: $310,151.51</a:t>
+                        <a:t>Non-Fleet Bound Premium: $309,854.46</a:t>
                       </a:r>
                     </a:p>
                   </a:txBody>
@@ -4624,7 +4624,7 @@
                           </a:solidFill>
                           <a:latin typeface="Segoe UI"/>
                         </a:rPr>
-                        <a:t>13.2%</a:t>
+                        <a:t>12.3%</a:t>
                       </a:r>
                     </a:p>
                   </a:txBody>
@@ -4906,7 +4906,7 @@
                           </a:solidFill>
                           <a:latin typeface="Segoe UI"/>
                         </a:rPr>
-                        <a:t>14</a:t>
+                        <a:t>13</a:t>
                       </a:r>
                     </a:p>
                   </a:txBody>

--- a/generated/Tier 1 Broker Scorecards/Aic Insurance Agency LLC_Broker_Scorecard.pptx
+++ b/generated/Tier 1 Broker Scorecards/Aic Insurance Agency LLC_Broker_Scorecard.pptx
@@ -3357,7 +3357,7 @@
                         <a:rPr sz="800">
                           <a:latin typeface="Segoe UI"/>
                         </a:rPr>
-                        <a:t>$1,633,938.05 / $1,654,888.52 / $660,989.19</a:t>
+                        <a:t>$1,633,938.05 / $1,685,737.85 / $691,838.52</a:t>
                       </a:r>
                     </a:p>
                   </a:txBody>
@@ -3394,7 +3394,7 @@
                         <a:rPr sz="900">
                           <a:latin typeface="Segoe UI"/>
                         </a:rPr>
-                        <a:t>Tier 1  |  6.30% / 15.00%</a:t>
+                        <a:t>Tier 1  |  6.97% / 15.00%</a:t>
                       </a:r>
                     </a:p>
                   </a:txBody>
@@ -3431,7 +3431,7 @@
                         <a:rPr sz="900">
                           <a:latin typeface="Segoe UI"/>
                         </a:rPr>
-                        <a:t>$2,287,513.27  (28.9% achieved)</a:t>
+                        <a:t>$2,287,513.27  (30.2% achieved)</a:t>
                       </a:r>
                     </a:p>
                   </a:txBody>
@@ -3653,7 +3653,7 @@
                         <a:rPr sz="900">
                           <a:latin typeface="Segoe UI"/>
                         </a:rPr>
-                        <a:t>Fleet Subs: 64  |  Binds: 3</a:t>
+                        <a:t>Fleet Subs: 65  |  Binds: 4</a:t>
                       </a:r>
                     </a:p>
                   </a:txBody>
@@ -3690,7 +3690,7 @@
                         <a:rPr sz="900">
                           <a:latin typeface="Segoe UI"/>
                         </a:rPr>
-                        <a:t>Fleet Bound Premium: $351,134.73</a:t>
+                        <a:t>Fleet Bound Premium: $381,145.41</a:t>
                       </a:r>
                     </a:p>
                   </a:txBody>
@@ -3727,7 +3727,7 @@
                         <a:rPr sz="900">
                           <a:latin typeface="Segoe UI"/>
                         </a:rPr>
-                        <a:t>Fleet Book %: 53.1%</a:t>
+                        <a:t>Fleet Book %: 55.1%</a:t>
                       </a:r>
                     </a:p>
                   </a:txBody>
@@ -3766,7 +3766,7 @@
                         <a:rPr sz="900">
                           <a:latin typeface="Segoe UI"/>
                         </a:rPr>
-                        <a:t>Non-Fleet Subs: 349  |  Binds: 23</a:t>
+                        <a:t>Non-Fleet Subs: 351  |  Binds: 25</a:t>
                       </a:r>
                     </a:p>
                   </a:txBody>
@@ -3803,7 +3803,7 @@
                         <a:rPr sz="900">
                           <a:latin typeface="Segoe UI"/>
                         </a:rPr>
-                        <a:t>Non-Fleet Bound Premium: $309,854.46</a:t>
+                        <a:t>Non-Fleet Bound Premium: $310,693.11</a:t>
                       </a:r>
                     </a:p>
                   </a:txBody>
@@ -3840,7 +3840,7 @@
                         <a:rPr sz="900">
                           <a:latin typeface="Segoe UI"/>
                         </a:rPr>
-                        <a:t>Non-Fleet Book %: 46.9%</a:t>
+                        <a:t>Non-Fleet Book %: 44.9%</a:t>
                       </a:r>
                     </a:p>
                   </a:txBody>
@@ -4351,7 +4351,7 @@
                           </a:solidFill>
                           <a:latin typeface="Segoe UI"/>
                         </a:rPr>
-                        <a:t>106</a:t>
+                        <a:t>105</a:t>
                       </a:r>
                     </a:p>
                   </a:txBody>
@@ -4428,7 +4428,7 @@
                           </a:solidFill>
                           <a:latin typeface="Segoe UI"/>
                         </a:rPr>
-                        <a:t>91</a:t>
+                        <a:t>94</a:t>
                       </a:r>
                     </a:p>
                   </a:txBody>
@@ -4624,7 +4624,7 @@
                           </a:solidFill>
                           <a:latin typeface="Segoe UI"/>
                         </a:rPr>
-                        <a:t>12.3%</a:t>
+                        <a:t>12.4%</a:t>
                       </a:r>
                     </a:p>
                   </a:txBody>
@@ -4707,7 +4707,7 @@
                           </a:solidFill>
                           <a:latin typeface="Segoe UI"/>
                         </a:rPr>
-                        <a:t>6.6%</a:t>
+                        <a:t>8.5%</a:t>
                       </a:r>
                     </a:p>
                   </a:txBody>
@@ -4983,7 +4983,7 @@
                           </a:solidFill>
                           <a:latin typeface="Segoe UI"/>
                         </a:rPr>
-                        <a:t>6</a:t>
+                        <a:t>8</a:t>
                       </a:r>
                     </a:p>
                   </a:txBody>
@@ -5258,11 +5258,11 @@
                       <a:r>
                         <a:rPr sz="800" b="1">
                           <a:solidFill>
-                            <a:srgbClr val="DC2626"/>
+                            <a:srgbClr val="059669"/>
                           </a:solidFill>
                           <a:latin typeface="Segoe UI"/>
                         </a:rPr>
-                        <a:t>$106.6K</a:t>
+                        <a:t>$137.5K</a:t>
                       </a:r>
                     </a:p>
                   </a:txBody>

--- a/generated/Tier 1 Broker Scorecards/Aic Insurance Agency LLC_Broker_Scorecard.pptx
+++ b/generated/Tier 1 Broker Scorecards/Aic Insurance Agency LLC_Broker_Scorecard.pptx
@@ -3357,7 +3357,7 @@
                         <a:rPr sz="800">
                           <a:latin typeface="Segoe UI"/>
                         </a:rPr>
-                        <a:t>$1,633,938.05 / $1,685,737.85 / $691,838.52</a:t>
+                        <a:t>$1,633,938.05 / $1,671,896.00 / $677,996.67</a:t>
                       </a:r>
                     </a:p>
                   </a:txBody>
@@ -3394,7 +3394,7 @@
                         <a:rPr sz="900">
                           <a:latin typeface="Segoe UI"/>
                         </a:rPr>
-                        <a:t>Tier 1  |  6.97% / 15.00%</a:t>
+                        <a:t>Tier 1  |  7.36% / 15.00%</a:t>
                       </a:r>
                     </a:p>
                   </a:txBody>
@@ -3431,7 +3431,7 @@
                         <a:rPr sz="900">
                           <a:latin typeface="Segoe UI"/>
                         </a:rPr>
-                        <a:t>$2,287,513.27  (30.2% achieved)</a:t>
+                        <a:t>$2,287,513.27  (29.6% achieved)</a:t>
                       </a:r>
                     </a:p>
                   </a:txBody>
@@ -3653,7 +3653,7 @@
                         <a:rPr sz="900">
                           <a:latin typeface="Segoe UI"/>
                         </a:rPr>
-                        <a:t>Fleet Subs: 65  |  Binds: 4</a:t>
+                        <a:t>Fleet Subs: 65  |  Binds: 5</a:t>
                       </a:r>
                     </a:p>
                   </a:txBody>
@@ -3690,7 +3690,7 @@
                         <a:rPr sz="900">
                           <a:latin typeface="Segoe UI"/>
                         </a:rPr>
-                        <a:t>Fleet Bound Premium: $381,145.41</a:t>
+                        <a:t>Fleet Bound Premium: $392,866.06</a:t>
                       </a:r>
                     </a:p>
                   </a:txBody>
@@ -3727,7 +3727,7 @@
                         <a:rPr sz="900">
                           <a:latin typeface="Segoe UI"/>
                         </a:rPr>
-                        <a:t>Fleet Book %: 55.1%</a:t>
+                        <a:t>Fleet Book %: 57.9%</a:t>
                       </a:r>
                     </a:p>
                   </a:txBody>
@@ -3766,7 +3766,7 @@
                         <a:rPr sz="900">
                           <a:latin typeface="Segoe UI"/>
                         </a:rPr>
-                        <a:t>Non-Fleet Subs: 351  |  Binds: 25</a:t>
+                        <a:t>Non-Fleet Subs: 356  |  Binds: 26</a:t>
                       </a:r>
                     </a:p>
                   </a:txBody>
@@ -3803,7 +3803,7 @@
                         <a:rPr sz="900">
                           <a:latin typeface="Segoe UI"/>
                         </a:rPr>
-                        <a:t>Non-Fleet Bound Premium: $310,693.11</a:t>
+                        <a:t>Non-Fleet Bound Premium: $285,130.61</a:t>
                       </a:r>
                     </a:p>
                   </a:txBody>
@@ -3840,7 +3840,7 @@
                         <a:rPr sz="900">
                           <a:latin typeface="Segoe UI"/>
                         </a:rPr>
-                        <a:t>Non-Fleet Book %: 44.9%</a:t>
+                        <a:t>Non-Fleet Book %: 42.1%</a:t>
                       </a:r>
                     </a:p>
                   </a:txBody>
@@ -4351,7 +4351,7 @@
                           </a:solidFill>
                           <a:latin typeface="Segoe UI"/>
                         </a:rPr>
-                        <a:t>105</a:t>
+                        <a:t>106</a:t>
                       </a:r>
                     </a:p>
                   </a:txBody>
@@ -4428,7 +4428,7 @@
                           </a:solidFill>
                           <a:latin typeface="Segoe UI"/>
                         </a:rPr>
-                        <a:t>94</a:t>
+                        <a:t>99</a:t>
                       </a:r>
                     </a:p>
                   </a:txBody>
@@ -4624,7 +4624,7 @@
                           </a:solidFill>
                           <a:latin typeface="Segoe UI"/>
                         </a:rPr>
-                        <a:t>12.4%</a:t>
+                        <a:t>13.2%</a:t>
                       </a:r>
                     </a:p>
                   </a:txBody>
@@ -4707,7 +4707,7 @@
                           </a:solidFill>
                           <a:latin typeface="Segoe UI"/>
                         </a:rPr>
-                        <a:t>8.5%</a:t>
+                        <a:t>9.1%</a:t>
                       </a:r>
                     </a:p>
                   </a:txBody>
@@ -4747,7 +4747,7 @@
                         <a:rPr sz="800">
                           <a:latin typeface="Segoe UI"/>
                         </a:rPr>
-                        <a:t>22.8%</a:t>
+                        <a:t>24.6%</a:t>
                       </a:r>
                     </a:p>
                   </a:txBody>
@@ -4906,7 +4906,7 @@
                           </a:solidFill>
                           <a:latin typeface="Segoe UI"/>
                         </a:rPr>
-                        <a:t>13</a:t>
+                        <a:t>14</a:t>
                       </a:r>
                     </a:p>
                   </a:txBody>
@@ -4983,7 +4983,7 @@
                           </a:solidFill>
                           <a:latin typeface="Segoe UI"/>
                         </a:rPr>
-                        <a:t>8</a:t>
+                        <a:t>9</a:t>
                       </a:r>
                     </a:p>
                   </a:txBody>
@@ -5020,7 +5020,7 @@
                         <a:rPr sz="800">
                           <a:latin typeface="Segoe UI"/>
                         </a:rPr>
-                        <a:t>13</a:t>
+                        <a:t>14</a:t>
                       </a:r>
                     </a:p>
                   </a:txBody>
@@ -5262,7 +5262,7 @@
                           </a:solidFill>
                           <a:latin typeface="Segoe UI"/>
                         </a:rPr>
-                        <a:t>$137.5K</a:t>
+                        <a:t>$123.6K</a:t>
                       </a:r>
                     </a:p>
                   </a:txBody>

--- a/generated/Tier 1 Broker Scorecards/Aic Insurance Agency LLC_Broker_Scorecard.pptx
+++ b/generated/Tier 1 Broker Scorecards/Aic Insurance Agency LLC_Broker_Scorecard.pptx
@@ -3394,7 +3394,7 @@
                         <a:rPr sz="900">
                           <a:latin typeface="Segoe UI"/>
                         </a:rPr>
-                        <a:t>Tier 1  |  7.36% / 15.00%</a:t>
+                        <a:t>Tier 1  |  6.78% / 15.00%</a:t>
                       </a:r>
                     </a:p>
                   </a:txBody>
@@ -3653,7 +3653,7 @@
                         <a:rPr sz="900">
                           <a:latin typeface="Segoe UI"/>
                         </a:rPr>
-                        <a:t>Fleet Subs: 65  |  Binds: 5</a:t>
+                        <a:t>Fleet Subs: 66  |  Binds: 4</a:t>
                       </a:r>
                     </a:p>
                   </a:txBody>
@@ -3690,7 +3690,7 @@
                         <a:rPr sz="900">
                           <a:latin typeface="Segoe UI"/>
                         </a:rPr>
-                        <a:t>Fleet Bound Premium: $392,866.06</a:t>
+                        <a:t>Fleet Bound Premium: $358,824.85</a:t>
                       </a:r>
                     </a:p>
                   </a:txBody>
@@ -3727,7 +3727,7 @@
                         <a:rPr sz="900">
                           <a:latin typeface="Segoe UI"/>
                         </a:rPr>
-                        <a:t>Fleet Book %: 57.9%</a:t>
+                        <a:t>Fleet Book %: 52.9%</a:t>
                       </a:r>
                     </a:p>
                   </a:txBody>
@@ -3766,7 +3766,7 @@
                         <a:rPr sz="900">
                           <a:latin typeface="Segoe UI"/>
                         </a:rPr>
-                        <a:t>Non-Fleet Subs: 356  |  Binds: 26</a:t>
+                        <a:t>Non-Fleet Subs: 362  |  Binds: 25</a:t>
                       </a:r>
                     </a:p>
                   </a:txBody>
@@ -3803,7 +3803,7 @@
                         <a:rPr sz="900">
                           <a:latin typeface="Segoe UI"/>
                         </a:rPr>
-                        <a:t>Non-Fleet Bound Premium: $285,130.61</a:t>
+                        <a:t>Non-Fleet Bound Premium: $319,171.82</a:t>
                       </a:r>
                     </a:p>
                   </a:txBody>
@@ -3840,7 +3840,7 @@
                         <a:rPr sz="900">
                           <a:latin typeface="Segoe UI"/>
                         </a:rPr>
-                        <a:t>Non-Fleet Book %: 42.1%</a:t>
+                        <a:t>Non-Fleet Book %: 47.1%</a:t>
                       </a:r>
                     </a:p>
                   </a:txBody>
@@ -4351,7 +4351,7 @@
                           </a:solidFill>
                           <a:latin typeface="Segoe UI"/>
                         </a:rPr>
-                        <a:t>106</a:t>
+                        <a:t>105</a:t>
                       </a:r>
                     </a:p>
                   </a:txBody>
@@ -4428,7 +4428,7 @@
                           </a:solidFill>
                           <a:latin typeface="Segoe UI"/>
                         </a:rPr>
-                        <a:t>99</a:t>
+                        <a:t>106</a:t>
                       </a:r>
                     </a:p>
                   </a:txBody>
@@ -4624,7 +4624,7 @@
                           </a:solidFill>
                           <a:latin typeface="Segoe UI"/>
                         </a:rPr>
-                        <a:t>13.2%</a:t>
+                        <a:t>12.4%</a:t>
                       </a:r>
                     </a:p>
                   </a:txBody>
@@ -4707,7 +4707,7 @@
                           </a:solidFill>
                           <a:latin typeface="Segoe UI"/>
                         </a:rPr>
-                        <a:t>9.1%</a:t>
+                        <a:t>7.5%</a:t>
                       </a:r>
                     </a:p>
                   </a:txBody>
@@ -4906,7 +4906,7 @@
                           </a:solidFill>
                           <a:latin typeface="Segoe UI"/>
                         </a:rPr>
-                        <a:t>14</a:t>
+                        <a:t>13</a:t>
                       </a:r>
                     </a:p>
                   </a:txBody>
@@ -4983,7 +4983,7 @@
                           </a:solidFill>
                           <a:latin typeface="Segoe UI"/>
                         </a:rPr>
-                        <a:t>9</a:t>
+                        <a:t>8</a:t>
                       </a:r>
                     </a:p>
                   </a:txBody>

--- a/generated/Tier 1 Broker Scorecards/Aic Insurance Agency LLC_Broker_Scorecard.pptx
+++ b/generated/Tier 1 Broker Scorecards/Aic Insurance Agency LLC_Broker_Scorecard.pptx
@@ -3394,7 +3394,7 @@
                         <a:rPr sz="900">
                           <a:latin typeface="Segoe UI"/>
                         </a:rPr>
-                        <a:t>Tier 1  |  6.78% / 15.00%</a:t>
+                        <a:t>Tier 1  |  6.73% / 15.00%</a:t>
                       </a:r>
                     </a:p>
                   </a:txBody>
@@ -3690,7 +3690,7 @@
                         <a:rPr sz="900">
                           <a:latin typeface="Segoe UI"/>
                         </a:rPr>
-                        <a:t>Fleet Bound Premium: $358,824.85</a:t>
+                        <a:t>Fleet Bound Premium: $350,685.42</a:t>
                       </a:r>
                     </a:p>
                   </a:txBody>
@@ -3727,7 +3727,7 @@
                         <a:rPr sz="900">
                           <a:latin typeface="Segoe UI"/>
                         </a:rPr>
-                        <a:t>Fleet Book %: 52.9%</a:t>
+                        <a:t>Fleet Book %: 51.7%</a:t>
                       </a:r>
                     </a:p>
                   </a:txBody>
@@ -3766,7 +3766,7 @@
                         <a:rPr sz="900">
                           <a:latin typeface="Segoe UI"/>
                         </a:rPr>
-                        <a:t>Non-Fleet Subs: 362  |  Binds: 25</a:t>
+                        <a:t>Non-Fleet Subs: 365  |  Binds: 25</a:t>
                       </a:r>
                     </a:p>
                   </a:txBody>
@@ -3803,7 +3803,7 @@
                         <a:rPr sz="900">
                           <a:latin typeface="Segoe UI"/>
                         </a:rPr>
-                        <a:t>Non-Fleet Bound Premium: $319,171.82</a:t>
+                        <a:t>Non-Fleet Bound Premium: $327,311.25</a:t>
                       </a:r>
                     </a:p>
                   </a:txBody>
@@ -3840,7 +3840,7 @@
                         <a:rPr sz="900">
                           <a:latin typeface="Segoe UI"/>
                         </a:rPr>
-                        <a:t>Non-Fleet Book %: 47.1%</a:t>
+                        <a:t>Non-Fleet Book %: 48.3%</a:t>
                       </a:r>
                     </a:p>
                   </a:txBody>
@@ -4351,7 +4351,7 @@
                           </a:solidFill>
                           <a:latin typeface="Segoe UI"/>
                         </a:rPr>
-                        <a:t>105</a:t>
+                        <a:t>106</a:t>
                       </a:r>
                     </a:p>
                   </a:txBody>
@@ -4428,7 +4428,7 @@
                           </a:solidFill>
                           <a:latin typeface="Segoe UI"/>
                         </a:rPr>
-                        <a:t>106</a:t>
+                        <a:t>109</a:t>
                       </a:r>
                     </a:p>
                   </a:txBody>
@@ -4624,7 +4624,7 @@
                           </a:solidFill>
                           <a:latin typeface="Segoe UI"/>
                         </a:rPr>
-                        <a:t>12.4%</a:t>
+                        <a:t>12.3%</a:t>
                       </a:r>
                     </a:p>
                   </a:txBody>
@@ -4707,7 +4707,7 @@
                           </a:solidFill>
                           <a:latin typeface="Segoe UI"/>
                         </a:rPr>
-                        <a:t>7.5%</a:t>
+                        <a:t>8.3%</a:t>
                       </a:r>
                     </a:p>
                   </a:txBody>
@@ -4983,7 +4983,7 @@
                           </a:solidFill>
                           <a:latin typeface="Segoe UI"/>
                         </a:rPr>
-                        <a:t>8</a:t>
+                        <a:t>9</a:t>
                       </a:r>
                     </a:p>
                   </a:txBody>

--- a/generated/Tier 1 Broker Scorecards/Aic Insurance Agency LLC_Broker_Scorecard.pptx
+++ b/generated/Tier 1 Broker Scorecards/Aic Insurance Agency LLC_Broker_Scorecard.pptx
@@ -3357,7 +3357,7 @@
                         <a:rPr sz="800">
                           <a:latin typeface="Segoe UI"/>
                         </a:rPr>
-                        <a:t>$1,633,938.05 / $1,671,896.00 / $677,996.67</a:t>
+                        <a:t>$1,633,938.05 / $1,550,564.64 / $677,996.67</a:t>
                       </a:r>
                     </a:p>
                   </a:txBody>
@@ -4747,7 +4747,7 @@
                         <a:rPr sz="800">
                           <a:latin typeface="Segoe UI"/>
                         </a:rPr>
-                        <a:t>24.6%</a:t>
+                        <a:t>22.8%</a:t>
                       </a:r>
                     </a:p>
                   </a:txBody>
@@ -5020,7 +5020,7 @@
                         <a:rPr sz="800">
                           <a:latin typeface="Segoe UI"/>
                         </a:rPr>
-                        <a:t>14</a:t>
+                        <a:t>13</a:t>
                       </a:r>
                     </a:p>
                   </a:txBody>
